--- a/Lectures/py_lec_14.pptx
+++ b/Lectures/py_lec_14.pptx
@@ -13794,7 +13794,7 @@
                 <a:t> (то, что возвращается функцией </a:t>
               </a:r>
               <a:r>
-                <a:rPr lang="en-US" sz="1400" b="1" dirty="0" err="1">
+                <a:rPr lang="en-US" sz="1400" b="1" dirty="0">
                   <a:solidFill>
                     <a:schemeClr val="tx1"/>
                   </a:solidFill>
@@ -13951,22 +13951,13 @@
             <a:lstStyle/>
             <a:p>
               <a:r>
-                <a:rPr lang="en-US" sz="1400" dirty="0">
+                <a:rPr lang="ru-RU" dirty="0">
                   <a:solidFill>
                     <a:schemeClr val="tx1"/>
                   </a:solidFill>
                   <a:latin typeface="+mn-lt"/>
                 </a:rPr>
-                <a:t>C</a:t>
-              </a:r>
-              <a:r>
-                <a:rPr lang="ru-RU" sz="1400" dirty="0" err="1">
-                  <a:solidFill>
-                    <a:schemeClr val="tx1"/>
-                  </a:solidFill>
-                  <a:latin typeface="+mn-lt"/>
-                </a:rPr>
-                <a:t>оздаем</a:t>
+                <a:t>Создаем </a:t>
               </a:r>
               <a:r>
                 <a:rPr lang="ru-RU" sz="1400" dirty="0">
@@ -13975,7 +13966,7 @@
                   </a:solidFill>
                   <a:latin typeface="+mn-lt"/>
                 </a:rPr>
-                <a:t> каталог </a:t>
+                <a:t>каталог </a:t>
               </a:r>
               <a:r>
                 <a:rPr lang="en-US" sz="1400" b="1" dirty="0">
@@ -14005,7 +13996,7 @@
                 <a:t>в каталоге приложения </a:t>
               </a:r>
               <a:r>
-                <a:rPr lang="en-US" sz="1400" b="1" dirty="0" err="1">
+                <a:rPr lang="en-US" sz="1400" b="1" dirty="0">
                   <a:solidFill>
                     <a:schemeClr val="tx1"/>
                   </a:solidFill>
@@ -14068,7 +14059,7 @@
                 <a:t>создаем каталог </a:t>
               </a:r>
               <a:r>
-                <a:rPr lang="en-US" sz="1400" b="1" dirty="0" err="1">
+                <a:rPr lang="en-US" sz="1400" b="1" dirty="0">
                   <a:solidFill>
                     <a:schemeClr val="tx1"/>
                   </a:solidFill>
@@ -14122,7 +14113,7 @@
                 <a:t>(</a:t>
               </a:r>
               <a:r>
-                <a:rPr lang="en-US" sz="1400" b="1" dirty="0" err="1">
+                <a:rPr lang="en-US" sz="1400" b="1" dirty="0">
                   <a:solidFill>
                     <a:schemeClr val="tx1"/>
                   </a:solidFill>
@@ -14158,7 +14149,7 @@
                 <a:t>/</a:t>
               </a:r>
               <a:r>
-                <a:rPr lang="en-US" sz="1400" b="1" dirty="0" err="1">
+                <a:rPr lang="en-US" sz="1400" b="1" dirty="0">
                   <a:solidFill>
                     <a:schemeClr val="tx1"/>
                   </a:solidFill>
@@ -14297,7 +14288,7 @@
                 <a:t>Загрузчик шаблонов </a:t>
               </a:r>
               <a:r>
-                <a:rPr lang="en-US" sz="1400" b="1" dirty="0" err="1">
+                <a:rPr lang="en-US" sz="1400" b="1" dirty="0">
                   <a:solidFill>
                     <a:schemeClr val="tx1"/>
                   </a:solidFill>
@@ -14324,22 +14315,13 @@
                 <a:t>работает так, что к созданному шаблону можно обращаться посредством </a:t>
               </a:r>
               <a:r>
-                <a:rPr lang="en-US" sz="1400" b="1" dirty="0" err="1">
+                <a:rPr lang="en-US" sz="1400" b="1" dirty="0">
                   <a:solidFill>
                     <a:schemeClr val="tx1"/>
                   </a:solidFill>
                   <a:latin typeface="+mn-lt"/>
                 </a:rPr>
-                <a:t>coolapp</a:t>
-              </a:r>
-              <a:r>
-                <a:rPr lang="en-US" sz="1400" b="1" dirty="0">
-                  <a:solidFill>
-                    <a:schemeClr val="tx1"/>
-                  </a:solidFill>
-                  <a:latin typeface="+mn-lt"/>
-                </a:rPr>
-                <a:t>/index.html</a:t>
+                <a:t>coolapp/index.html</a:t>
               </a:r>
               <a:endParaRPr lang="ru-RU" b="1" dirty="0">
                 <a:solidFill>
@@ -26840,7 +26822,7 @@
               <a:t>Для работы с базой данных </a:t>
             </a:r>
             <a:r>
-              <a:rPr lang="ru-RU" sz="1400" b="1" dirty="0" err="1">
+              <a:rPr lang="ru-RU" sz="1400" b="1" dirty="0">
                 <a:solidFill>
                   <a:schemeClr val="tx1"/>
                 </a:solidFill>
@@ -28252,7 +28234,7 @@
               <a:t> (</a:t>
             </a:r>
             <a:r>
-              <a:rPr lang="ru-RU" sz="1400" b="1" dirty="0" err="1">
+              <a:rPr lang="ru-RU" sz="1400" b="1" dirty="0">
                 <a:solidFill>
                   <a:schemeClr val="tx1"/>
                 </a:solidFill>
